--- a/Credit Risk Analysis & Insights using Power BI.pptx
+++ b/Credit Risk Analysis & Insights using Power BI.pptx
@@ -7,9 +7,7 @@
   <p:sldIdLst>
     <p:sldId id="260" r:id="rId2"/>
     <p:sldId id="256" r:id="rId3"/>
-    <p:sldId id="257" r:id="rId4"/>
-    <p:sldId id="258" r:id="rId5"/>
-    <p:sldId id="259" r:id="rId6"/>
+    <p:sldId id="261" r:id="rId4"/>
   </p:sldIdLst>
   <p:sldSz cx="12192000" cy="6858000"/>
   <p:notesSz cx="6858000" cy="9144000"/>
@@ -108,6 +106,11 @@
       </a:defRPr>
     </a:lvl9pPr>
   </p:defaultTextStyle>
+  <p:extLst>
+    <p:ext uri="{EFAFB233-063F-42B5-8137-9DF3F51BA10A}">
+      <p15:sldGuideLst xmlns:p15="http://schemas.microsoft.com/office/powerpoint/2012/main"/>
+    </p:ext>
+  </p:extLst>
 </p:presentation>
 </file>
 
@@ -264,7 +267,7 @@
           <a:p>
             <a:fld id="{D1D1EADE-8E88-4C7C-8AC5-FB148DE4940E}" type="datetime1">
               <a:rPr lang="en-US" smtClean="0"/>
-              <a:t>7/20/2025</a:t>
+              <a:t>3/6/2026</a:t>
             </a:fld>
             <a:endParaRPr lang="en-US"/>
           </a:p>
@@ -464,7 +467,7 @@
           <a:p>
             <a:fld id="{EC3C8B9C-477D-492A-96AD-1FC2CC997A73}" type="datetime1">
               <a:rPr lang="en-US" smtClean="0"/>
-              <a:t>7/20/2025</a:t>
+              <a:t>3/6/2026</a:t>
             </a:fld>
             <a:endParaRPr lang="en-US"/>
           </a:p>
@@ -674,7 +677,7 @@
           <a:p>
             <a:fld id="{42D3AED5-E26D-4E29-B1B3-7847B6779594}" type="datetime1">
               <a:rPr lang="en-US" smtClean="0"/>
-              <a:t>7/20/2025</a:t>
+              <a:t>3/6/2026</a:t>
             </a:fld>
             <a:endParaRPr lang="en-US"/>
           </a:p>
@@ -874,7 +877,7 @@
           <a:p>
             <a:fld id="{157B6794-849E-4626-908B-D15793550EFB}" type="datetime1">
               <a:rPr lang="en-US" smtClean="0"/>
-              <a:t>7/20/2025</a:t>
+              <a:t>3/6/2026</a:t>
             </a:fld>
             <a:endParaRPr lang="en-US"/>
           </a:p>
@@ -1150,7 +1153,7 @@
           <a:p>
             <a:fld id="{63DB64E7-5594-42A3-ADBF-E95A7ACEAD64}" type="datetime1">
               <a:rPr lang="en-US" smtClean="0"/>
-              <a:t>7/20/2025</a:t>
+              <a:t>3/6/2026</a:t>
             </a:fld>
             <a:endParaRPr lang="en-US"/>
           </a:p>
@@ -1423,7 +1426,7 @@
           <a:p>
             <a:fld id="{18462B0B-D248-4FFB-8695-AD7FA4B1284A}" type="datetime1">
               <a:rPr lang="en-US" smtClean="0"/>
-              <a:t>7/20/2025</a:t>
+              <a:t>3/6/2026</a:t>
             </a:fld>
             <a:endParaRPr lang="en-US"/>
           </a:p>
@@ -1846,7 +1849,7 @@
           <a:p>
             <a:fld id="{D0378EFB-9159-4510-B73F-4F0409ADE937}" type="datetime1">
               <a:rPr lang="en-US" smtClean="0"/>
-              <a:t>7/20/2025</a:t>
+              <a:t>3/6/2026</a:t>
             </a:fld>
             <a:endParaRPr lang="en-US"/>
           </a:p>
@@ -1988,7 +1991,7 @@
           <a:p>
             <a:fld id="{89BC9412-2452-4BED-A324-9D8C115361AD}" type="datetime1">
               <a:rPr lang="en-US" smtClean="0"/>
-              <a:t>7/20/2025</a:t>
+              <a:t>3/6/2026</a:t>
             </a:fld>
             <a:endParaRPr lang="en-US"/>
           </a:p>
@@ -2101,7 +2104,7 @@
           <a:p>
             <a:fld id="{F5318F62-D251-40E8-A23C-F4CFE9FEAB41}" type="datetime1">
               <a:rPr lang="en-US" smtClean="0"/>
-              <a:t>7/20/2025</a:t>
+              <a:t>3/6/2026</a:t>
             </a:fld>
             <a:endParaRPr lang="en-US"/>
           </a:p>
@@ -2414,7 +2417,7 @@
           <a:p>
             <a:fld id="{44F76144-149E-4874-93A5-554A0357CF82}" type="datetime1">
               <a:rPr lang="en-US" smtClean="0"/>
-              <a:t>7/20/2025</a:t>
+              <a:t>3/6/2026</a:t>
             </a:fld>
             <a:endParaRPr lang="en-US"/>
           </a:p>
@@ -2707,7 +2710,7 @@
           <a:p>
             <a:fld id="{50BA65D8-0540-4835-AE5C-25D29DBA01BE}" type="datetime1">
               <a:rPr lang="en-US" smtClean="0"/>
-              <a:t>7/20/2025</a:t>
+              <a:t>3/6/2026</a:t>
             </a:fld>
             <a:endParaRPr lang="en-US"/>
           </a:p>
@@ -2949,7 +2952,7 @@
           <a:p>
             <a:fld id="{E31BA835-12AC-4E8F-955A-EA3F4DE2791F}" type="datetime1">
               <a:rPr lang="en-US" smtClean="0"/>
-              <a:t>7/20/2025</a:t>
+              <a:t>3/6/2026</a:t>
             </a:fld>
             <a:endParaRPr lang="en-US"/>
           </a:p>
@@ -3480,18 +3483,13 @@
           <a:p>
             <a:pPr algn="ctr"/>
             <a:r>
-              <a:rPr lang="en-US" sz="2400" b="1" dirty="0">
+              <a:rPr lang="en-IN" sz="2400" b="1" noProof="0" dirty="0">
                 <a:latin typeface="Calibri" panose="020F0502020204030204" pitchFamily="34" charset="0"/>
                 <a:ea typeface="Calibri" panose="020F0502020204030204" pitchFamily="34" charset="0"/>
                 <a:cs typeface="Calibri" panose="020F0502020204030204" pitchFamily="34" charset="0"/>
               </a:rPr>
               <a:t>Credit Risk Analysis &amp; Insights using Power BI</a:t>
             </a:r>
-            <a:endParaRPr lang="en-IN" sz="2400" b="1" dirty="0">
-              <a:latin typeface="Calibri" panose="020F0502020204030204" pitchFamily="34" charset="0"/>
-              <a:ea typeface="Calibri" panose="020F0502020204030204" pitchFamily="34" charset="0"/>
-              <a:cs typeface="Calibri" panose="020F0502020204030204" pitchFamily="34" charset="0"/>
-            </a:endParaRPr>
           </a:p>
         </p:txBody>
       </p:sp>
@@ -3524,7 +3522,7 @@
           <a:lstStyle/>
           <a:p>
             <a:r>
-              <a:rPr lang="en-US" b="1" dirty="0">
+              <a:rPr lang="en-IN" b="1" noProof="0" dirty="0">
                 <a:latin typeface="Calibri" panose="020F0502020204030204" pitchFamily="34" charset="0"/>
                 <a:ea typeface="Calibri" panose="020F0502020204030204" pitchFamily="34" charset="0"/>
                 <a:cs typeface="Calibri" panose="020F0502020204030204" pitchFamily="34" charset="0"/>
@@ -3538,7 +3536,7 @@
               <a:buChar char="•"/>
             </a:pPr>
             <a:r>
-              <a:rPr lang="en-IN" sz="1600" dirty="0">
+              <a:rPr lang="en-IN" sz="1600" noProof="0" dirty="0">
                 <a:latin typeface="Calibri" panose="020F0502020204030204" pitchFamily="34" charset="0"/>
                 <a:ea typeface="Calibri" panose="020F0502020204030204" pitchFamily="34" charset="0"/>
                 <a:cs typeface="Calibri" panose="020F0502020204030204" pitchFamily="34" charset="0"/>
@@ -3552,7 +3550,7 @@
               <a:buChar char="•"/>
             </a:pPr>
             <a:r>
-              <a:rPr lang="en-IN" sz="1600" dirty="0">
+              <a:rPr lang="en-IN" sz="1600" noProof="0" dirty="0">
                 <a:latin typeface="Calibri" panose="020F0502020204030204" pitchFamily="34" charset="0"/>
                 <a:ea typeface="Calibri" panose="020F0502020204030204" pitchFamily="34" charset="0"/>
                 <a:cs typeface="Calibri" panose="020F0502020204030204" pitchFamily="34" charset="0"/>
@@ -3566,7 +3564,7 @@
               <a:buChar char="•"/>
             </a:pPr>
             <a:r>
-              <a:rPr lang="en-IN" sz="1600" dirty="0">
+              <a:rPr lang="en-IN" sz="1600" noProof="0" dirty="0">
                 <a:latin typeface="Calibri" panose="020F0502020204030204" pitchFamily="34" charset="0"/>
                 <a:ea typeface="Calibri" panose="020F0502020204030204" pitchFamily="34" charset="0"/>
                 <a:cs typeface="Calibri" panose="020F0502020204030204" pitchFamily="34" charset="0"/>
@@ -3591,7 +3589,7 @@
         <p:spPr>
           <a:xfrm>
             <a:off x="800100" y="1050092"/>
-            <a:ext cx="10579100" cy="1107996"/>
+            <a:ext cx="10579100" cy="1354217"/>
           </a:xfrm>
           <a:prstGeom prst="rect">
             <a:avLst/>
@@ -3605,7 +3603,7 @@
           <a:lstStyle/>
           <a:p>
             <a:r>
-              <a:rPr lang="en-US" b="1" dirty="0">
+              <a:rPr lang="en-IN" b="1" noProof="0" dirty="0">
                 <a:latin typeface="Calibri" panose="020F0502020204030204" pitchFamily="34" charset="0"/>
                 <a:ea typeface="Calibri" panose="020F0502020204030204" pitchFamily="34" charset="0"/>
                 <a:cs typeface="Calibri" panose="020F0502020204030204" pitchFamily="34" charset="0"/>
@@ -3615,18 +3613,13 @@
           </a:p>
           <a:p>
             <a:r>
-              <a:rPr lang="en-US" sz="1600" dirty="0">
+              <a:rPr lang="en-IN" sz="1600" noProof="0" dirty="0">
                 <a:latin typeface="Calibri" panose="020F0502020204030204" pitchFamily="34" charset="0"/>
                 <a:ea typeface="Calibri" panose="020F0502020204030204" pitchFamily="34" charset="0"/>
                 <a:cs typeface="Calibri" panose="020F0502020204030204" pitchFamily="34" charset="0"/>
               </a:rPr>
-              <a:t>This project analyzes credit applicant data to uncover meaningful patterns in age, employment status, and registration behavior. The dashboard is designed to assist decision-makers in identifying risk profiles and understanding applicant behavior through interactive visualizations.</a:t>
-            </a:r>
-            <a:endParaRPr lang="en-IN" sz="1600" dirty="0">
-              <a:latin typeface="Calibri" panose="020F0502020204030204" pitchFamily="34" charset="0"/>
-              <a:ea typeface="Calibri" panose="020F0502020204030204" pitchFamily="34" charset="0"/>
-              <a:cs typeface="Calibri" panose="020F0502020204030204" pitchFamily="34" charset="0"/>
-            </a:endParaRPr>
+              <a:t>This dashboard was designed to help the financial institution why there are so many loan defaults by identifying pattern and highlight trend in loan default behaviour. It is analysing borrower characteristics such as education level, income type, gender, occupation and regional risk. These insights support better decision making and help lender improve credit risk assessment and lending policies.</a:t>
+            </a:r>
           </a:p>
         </p:txBody>
       </p:sp>
@@ -3659,7 +3652,7 @@
           <a:lstStyle/>
           <a:p>
             <a:r>
-              <a:rPr lang="en-US" b="1" dirty="0">
+              <a:rPr lang="en-IN" b="1" noProof="0" dirty="0">
                 <a:latin typeface="Calibri" panose="020F0502020204030204" pitchFamily="34" charset="0"/>
                 <a:ea typeface="Calibri" panose="020F0502020204030204" pitchFamily="34" charset="0"/>
                 <a:cs typeface="Calibri" panose="020F0502020204030204" pitchFamily="34" charset="0"/>
@@ -3673,7 +3666,7 @@
               <a:buChar char="•"/>
             </a:pPr>
             <a:r>
-              <a:rPr lang="en-IN" sz="1600" dirty="0">
+              <a:rPr lang="en-IN" sz="1600" noProof="0" dirty="0">
                 <a:latin typeface="Calibri" panose="020F0502020204030204" pitchFamily="34" charset="0"/>
                 <a:ea typeface="Calibri" panose="020F0502020204030204" pitchFamily="34" charset="0"/>
                 <a:cs typeface="Calibri" panose="020F0502020204030204" pitchFamily="34" charset="0"/>
@@ -3687,7 +3680,7 @@
               <a:buChar char="•"/>
             </a:pPr>
             <a:r>
-              <a:rPr lang="en-IN" sz="1600" i="1" dirty="0">
+              <a:rPr lang="en-IN" sz="1600" i="1" noProof="0" dirty="0">
                 <a:latin typeface="Calibri" panose="020F0502020204030204" pitchFamily="34" charset="0"/>
                 <a:ea typeface="Calibri" panose="020F0502020204030204" pitchFamily="34" charset="0"/>
                 <a:cs typeface="Calibri" panose="020F0502020204030204" pitchFamily="34" charset="0"/>
@@ -3701,7 +3694,7 @@
               <a:buChar char="•"/>
             </a:pPr>
             <a:r>
-              <a:rPr lang="en-IN" sz="1600" dirty="0">
+              <a:rPr lang="en-IN" sz="1600" noProof="0" dirty="0">
                 <a:latin typeface="Calibri" panose="020F0502020204030204" pitchFamily="34" charset="0"/>
                 <a:ea typeface="Calibri" panose="020F0502020204030204" pitchFamily="34" charset="0"/>
                 <a:cs typeface="Calibri" panose="020F0502020204030204" pitchFamily="34" charset="0"/>
@@ -3709,7 +3702,7 @@
               </a:rPr>
               <a:t>ankitrawat.ds@gmail.com</a:t>
             </a:r>
-            <a:endParaRPr lang="en-IN" sz="1600" dirty="0">
+            <a:endParaRPr lang="en-IN" sz="1600" noProof="0" dirty="0">
               <a:latin typeface="Calibri" panose="020F0502020204030204" pitchFamily="34" charset="0"/>
               <a:ea typeface="Calibri" panose="020F0502020204030204" pitchFamily="34" charset="0"/>
               <a:cs typeface="Calibri" panose="020F0502020204030204" pitchFamily="34" charset="0"/>
@@ -3721,7 +3714,7 @@
               <a:buChar char="•"/>
             </a:pPr>
             <a:r>
-              <a:rPr lang="en-IN" sz="1600" dirty="0" err="1">
+              <a:rPr lang="en-IN" sz="1600" noProof="0" dirty="0" err="1">
                 <a:latin typeface="Calibri" panose="020F0502020204030204" pitchFamily="34" charset="0"/>
                 <a:ea typeface="Calibri" panose="020F0502020204030204" pitchFamily="34" charset="0"/>
                 <a:cs typeface="Calibri" panose="020F0502020204030204" pitchFamily="34" charset="0"/>
@@ -3729,7 +3722,7 @@
               </a:rPr>
               <a:t>Linkedin</a:t>
             </a:r>
-            <a:endParaRPr lang="en-IN" sz="1600" dirty="0">
+            <a:endParaRPr lang="en-IN" sz="1600" noProof="0" dirty="0">
               <a:latin typeface="Calibri" panose="020F0502020204030204" pitchFamily="34" charset="0"/>
               <a:ea typeface="Calibri" panose="020F0502020204030204" pitchFamily="34" charset="0"/>
               <a:cs typeface="Calibri" panose="020F0502020204030204" pitchFamily="34" charset="0"/>
@@ -4052,10 +4045,10 @@
       </p:sp>
       <p:pic>
         <p:nvPicPr>
-          <p:cNvPr id="6" name="Picture 5" descr="A screenshot of a credit risk dashboard&#10;&#10;AI-generated content may be incorrect.">
-            <a:extLst>
-              <a:ext uri="{FF2B5EF4-FFF2-40B4-BE49-F238E27FC236}">
-                <a16:creationId xmlns:a16="http://schemas.microsoft.com/office/drawing/2014/main" id="{EF2F9178-F5B4-BA19-32BB-1ED1C7AB7D55}"/>
+          <p:cNvPr id="4" name="Picture 3">
+            <a:extLst>
+              <a:ext uri="{FF2B5EF4-FFF2-40B4-BE49-F238E27FC236}">
+                <a16:creationId xmlns:a16="http://schemas.microsoft.com/office/drawing/2014/main" id="{8C174FC5-038E-083C-B25F-10B618B82B31}"/>
               </a:ext>
             </a:extLst>
           </p:cNvPr>
@@ -4065,21 +4058,15 @@
           <p:nvPr/>
         </p:nvPicPr>
         <p:blipFill>
-          <a:blip r:embed="rId2">
-            <a:extLst>
-              <a:ext uri="{28A0092B-C50C-407E-A947-70E740481C1C}">
-                <a14:useLocalDpi xmlns:a14="http://schemas.microsoft.com/office/drawing/2010/main" val="0"/>
-              </a:ext>
-            </a:extLst>
-          </a:blip>
+          <a:blip r:embed="rId2"/>
           <a:stretch>
             <a:fillRect/>
           </a:stretch>
         </p:blipFill>
         <p:spPr>
           <a:xfrm>
-            <a:off x="77107" y="0"/>
-            <a:ext cx="12037786" cy="6858000"/>
+            <a:off x="108045" y="0"/>
+            <a:ext cx="11975910" cy="6858000"/>
           </a:xfrm>
           <a:prstGeom prst="rect">
             <a:avLst/>
@@ -4107,7 +4094,7 @@
         <p:cNvPr id="1" name="">
           <a:extLst>
             <a:ext uri="{FF2B5EF4-FFF2-40B4-BE49-F238E27FC236}">
-              <a16:creationId xmlns:a16="http://schemas.microsoft.com/office/drawing/2014/main" id="{C09A4501-744F-ADCA-F7A5-ADEEEDA38E18}"/>
+              <a16:creationId xmlns:a16="http://schemas.microsoft.com/office/drawing/2014/main" id="{68A938B7-CB8C-FF2C-40F5-EE379C1E1656}"/>
             </a:ext>
           </a:extLst>
         </p:cNvPr>
@@ -4122,190 +4109,237 @@
           <a:chExt cx="0" cy="0"/>
         </a:xfrm>
       </p:grpSpPr>
-      <p:pic>
-        <p:nvPicPr>
-          <p:cNvPr id="10" name="Picture 9" descr="A screenshot of a graph&#10;&#10;AI-generated content may be incorrect.">
-            <a:extLst>
-              <a:ext uri="{FF2B5EF4-FFF2-40B4-BE49-F238E27FC236}">
-                <a16:creationId xmlns:a16="http://schemas.microsoft.com/office/drawing/2014/main" id="{8AFDEA28-3CAE-14D8-F49D-4AA8E1920B25}"/>
-              </a:ext>
-            </a:extLst>
-          </p:cNvPr>
-          <p:cNvPicPr>
-            <a:picLocks noChangeAspect="1"/>
-          </p:cNvPicPr>
+      <p:sp>
+        <p:nvSpPr>
+          <p:cNvPr id="4" name="TextBox 3">
+            <a:extLst>
+              <a:ext uri="{FF2B5EF4-FFF2-40B4-BE49-F238E27FC236}">
+                <a16:creationId xmlns:a16="http://schemas.microsoft.com/office/drawing/2014/main" id="{3A85AFCE-8FB9-2FE6-C790-CC47AD975160}"/>
+              </a:ext>
+            </a:extLst>
+          </p:cNvPr>
+          <p:cNvSpPr txBox="1"/>
           <p:nvPr/>
-        </p:nvPicPr>
-        <p:blipFill>
-          <a:blip r:embed="rId2">
-            <a:extLst>
-              <a:ext uri="{28A0092B-C50C-407E-A947-70E740481C1C}">
-                <a14:useLocalDpi xmlns:a14="http://schemas.microsoft.com/office/drawing/2010/main" val="0"/>
-              </a:ext>
-            </a:extLst>
-          </a:blip>
-          <a:stretch>
-            <a:fillRect/>
-          </a:stretch>
-        </p:blipFill>
+        </p:nvSpPr>
         <p:spPr>
           <a:xfrm>
-            <a:off x="0" y="0"/>
-            <a:ext cx="12192000" cy="6508084"/>
+            <a:off x="800100" y="241300"/>
+            <a:ext cx="10579100" cy="461665"/>
           </a:xfrm>
           <a:prstGeom prst="rect">
             <a:avLst/>
           </a:prstGeom>
+          <a:noFill/>
         </p:spPr>
-      </p:pic>
-    </p:spTree>
-    <p:extLst>
-      <p:ext uri="{BB962C8B-B14F-4D97-AF65-F5344CB8AC3E}">
-        <p14:creationId xmlns:p14="http://schemas.microsoft.com/office/powerpoint/2010/main" val="246821567"/>
-      </p:ext>
-    </p:extLst>
-  </p:cSld>
-  <p:clrMapOvr>
-    <a:masterClrMapping/>
-  </p:clrMapOvr>
-</p:sld>
-</file>
-
-<file path=ppt/slides/slide4.xml><?xml version="1.0" encoding="utf-8"?>
-<p:sld xmlns:a="http://schemas.openxmlformats.org/drawingml/2006/main" xmlns:r="http://schemas.openxmlformats.org/officeDocument/2006/relationships" xmlns:p="http://schemas.openxmlformats.org/presentationml/2006/main">
-  <p:cSld>
-    <p:spTree>
-      <p:nvGrpSpPr>
-        <p:cNvPr id="1" name="">
-          <a:extLst>
-            <a:ext uri="{FF2B5EF4-FFF2-40B4-BE49-F238E27FC236}">
-              <a16:creationId xmlns:a16="http://schemas.microsoft.com/office/drawing/2014/main" id="{DE322DAF-77C5-B98C-3E87-CB39B54C8561}"/>
-            </a:ext>
-          </a:extLst>
-        </p:cNvPr>
-        <p:cNvGrpSpPr/>
-        <p:nvPr/>
-      </p:nvGrpSpPr>
-      <p:grpSpPr>
-        <a:xfrm>
-          <a:off x="0" y="0"/>
-          <a:ext cx="0" cy="0"/>
-          <a:chOff x="0" y="0"/>
-          <a:chExt cx="0" cy="0"/>
-        </a:xfrm>
-      </p:grpSpPr>
-      <p:pic>
-        <p:nvPicPr>
-          <p:cNvPr id="14" name="Picture 13" descr="A screenshot of a computer&#10;&#10;AI-generated content may be incorrect.">
-            <a:extLst>
-              <a:ext uri="{FF2B5EF4-FFF2-40B4-BE49-F238E27FC236}">
-                <a16:creationId xmlns:a16="http://schemas.microsoft.com/office/drawing/2014/main" id="{DF0CE4A5-5821-44AC-DCEE-022A40E6E2D6}"/>
-              </a:ext>
-            </a:extLst>
-          </p:cNvPr>
-          <p:cNvPicPr>
-            <a:picLocks noChangeAspect="1"/>
-          </p:cNvPicPr>
+        <p:txBody>
+          <a:bodyPr wrap="square" rtlCol="0">
+            <a:spAutoFit/>
+          </a:bodyPr>
+          <a:lstStyle/>
+          <a:p>
+            <a:pPr algn="ctr"/>
+            <a:r>
+              <a:rPr lang="en-IN" sz="2400" b="1" noProof="0" dirty="0">
+                <a:latin typeface="Calibri" panose="020F0502020204030204" pitchFamily="34" charset="0"/>
+                <a:ea typeface="Calibri" panose="020F0502020204030204" pitchFamily="34" charset="0"/>
+                <a:cs typeface="Calibri" panose="020F0502020204030204" pitchFamily="34" charset="0"/>
+              </a:rPr>
+              <a:t>Meaningful Insights</a:t>
+            </a:r>
+          </a:p>
+        </p:txBody>
+      </p:sp>
+      <p:sp>
+        <p:nvSpPr>
+          <p:cNvPr id="9" name="TextBox 8">
+            <a:extLst>
+              <a:ext uri="{FF2B5EF4-FFF2-40B4-BE49-F238E27FC236}">
+                <a16:creationId xmlns:a16="http://schemas.microsoft.com/office/drawing/2014/main" id="{28AE534E-1F67-01AC-A229-8A75D295606D}"/>
+              </a:ext>
+            </a:extLst>
+          </p:cNvPr>
+          <p:cNvSpPr txBox="1"/>
           <p:nvPr/>
-        </p:nvPicPr>
-        <p:blipFill>
-          <a:blip r:embed="rId2">
-            <a:extLst>
-              <a:ext uri="{28A0092B-C50C-407E-A947-70E740481C1C}">
-                <a14:useLocalDpi xmlns:a14="http://schemas.microsoft.com/office/drawing/2010/main" val="0"/>
-              </a:ext>
-            </a:extLst>
-          </a:blip>
-          <a:stretch>
-            <a:fillRect/>
-          </a:stretch>
-        </p:blipFill>
+        </p:nvSpPr>
         <p:spPr>
           <a:xfrm>
-            <a:off x="0" y="27088"/>
-            <a:ext cx="12192000" cy="6830912"/>
+            <a:off x="800100" y="1050092"/>
+            <a:ext cx="10579100" cy="3139321"/>
           </a:xfrm>
           <a:prstGeom prst="rect">
             <a:avLst/>
           </a:prstGeom>
+          <a:noFill/>
         </p:spPr>
-      </p:pic>
-    </p:spTree>
-    <p:extLst>
-      <p:ext uri="{BB962C8B-B14F-4D97-AF65-F5344CB8AC3E}">
-        <p14:creationId xmlns:p14="http://schemas.microsoft.com/office/powerpoint/2010/main" val="2667617606"/>
-      </p:ext>
-    </p:extLst>
-  </p:cSld>
-  <p:clrMapOvr>
-    <a:masterClrMapping/>
-  </p:clrMapOvr>
-</p:sld>
-</file>
-
-<file path=ppt/slides/slide5.xml><?xml version="1.0" encoding="utf-8"?>
-<p:sld xmlns:a="http://schemas.openxmlformats.org/drawingml/2006/main" xmlns:r="http://schemas.openxmlformats.org/officeDocument/2006/relationships" xmlns:p="http://schemas.openxmlformats.org/presentationml/2006/main">
-  <p:cSld>
-    <p:spTree>
-      <p:nvGrpSpPr>
-        <p:cNvPr id="1" name="">
-          <a:extLst>
-            <a:ext uri="{FF2B5EF4-FFF2-40B4-BE49-F238E27FC236}">
-              <a16:creationId xmlns:a16="http://schemas.microsoft.com/office/drawing/2014/main" id="{329A4A3C-192E-229C-F6C6-399A7020F166}"/>
-            </a:ext>
-          </a:extLst>
-        </p:cNvPr>
-        <p:cNvGrpSpPr/>
-        <p:nvPr/>
-      </p:nvGrpSpPr>
-      <p:grpSpPr>
-        <a:xfrm>
-          <a:off x="0" y="0"/>
-          <a:ext cx="0" cy="0"/>
-          <a:chOff x="0" y="0"/>
-          <a:chExt cx="0" cy="0"/>
-        </a:xfrm>
-      </p:grpSpPr>
-      <p:pic>
-        <p:nvPicPr>
-          <p:cNvPr id="16" name="Picture 15" descr="A screenshot of a graph&#10;&#10;AI-generated content may be incorrect.">
-            <a:extLst>
-              <a:ext uri="{FF2B5EF4-FFF2-40B4-BE49-F238E27FC236}">
-                <a16:creationId xmlns:a16="http://schemas.microsoft.com/office/drawing/2014/main" id="{7BFE7484-8800-0119-1E4D-9ED5D4894809}"/>
-              </a:ext>
-            </a:extLst>
-          </p:cNvPr>
-          <p:cNvPicPr>
-            <a:picLocks noChangeAspect="1"/>
-          </p:cNvPicPr>
+        <p:txBody>
+          <a:bodyPr wrap="square" rtlCol="0">
+            <a:spAutoFit/>
+          </a:bodyPr>
+          <a:lstStyle/>
+          <a:p>
+            <a:r>
+              <a:rPr lang="en-US" b="1" noProof="0" dirty="0">
+                <a:latin typeface="Calibri" panose="020F0502020204030204" pitchFamily="34" charset="0"/>
+                <a:ea typeface="Calibri" panose="020F0502020204030204" pitchFamily="34" charset="0"/>
+                <a:cs typeface="Calibri" panose="020F0502020204030204" pitchFamily="34" charset="0"/>
+              </a:rPr>
+              <a:t>Overall Loan Default Situation-</a:t>
+            </a:r>
+          </a:p>
+          <a:p>
+            <a:pPr marL="285750" indent="-285750">
+              <a:buFont typeface="Arial" panose="020B0604020202020204" pitchFamily="34" charset="0"/>
+              <a:buChar char="•"/>
+            </a:pPr>
+            <a:r>
+              <a:rPr lang="en-US" sz="1600" noProof="0" dirty="0">
+                <a:latin typeface="Calibri" panose="020F0502020204030204" pitchFamily="34" charset="0"/>
+                <a:ea typeface="Calibri" panose="020F0502020204030204" pitchFamily="34" charset="0"/>
+                <a:cs typeface="Calibri" panose="020F0502020204030204" pitchFamily="34" charset="0"/>
+              </a:rPr>
+              <a:t>Out of 307K total loan applications, about 8.07% borrowers defaulted.</a:t>
+            </a:r>
+          </a:p>
+          <a:p>
+            <a:pPr marL="285750" indent="-285750">
+              <a:buFont typeface="Arial" panose="020B0604020202020204" pitchFamily="34" charset="0"/>
+              <a:buChar char="•"/>
+            </a:pPr>
+            <a:r>
+              <a:rPr lang="en-US" sz="1600" noProof="0" dirty="0">
+                <a:latin typeface="Calibri" panose="020F0502020204030204" pitchFamily="34" charset="0"/>
+                <a:ea typeface="Calibri" panose="020F0502020204030204" pitchFamily="34" charset="0"/>
+                <a:cs typeface="Calibri" panose="020F0502020204030204" pitchFamily="34" charset="0"/>
+              </a:rPr>
+              <a:t>Around 91.93% of borrowers repay successfully, which indicates the portfolio is mostly healthy but still contains a significant risk segment.</a:t>
+            </a:r>
+          </a:p>
+          <a:p>
+            <a:endParaRPr lang="en-US" sz="1600" dirty="0">
+              <a:latin typeface="Calibri" panose="020F0502020204030204" pitchFamily="34" charset="0"/>
+              <a:ea typeface="Calibri" panose="020F0502020204030204" pitchFamily="34" charset="0"/>
+              <a:cs typeface="Calibri" panose="020F0502020204030204" pitchFamily="34" charset="0"/>
+            </a:endParaRPr>
+          </a:p>
+          <a:p>
+            <a:r>
+              <a:rPr lang="en-US" b="1" noProof="0" dirty="0">
+                <a:latin typeface="Calibri" panose="020F0502020204030204" pitchFamily="34" charset="0"/>
+                <a:ea typeface="Calibri" panose="020F0502020204030204" pitchFamily="34" charset="0"/>
+                <a:cs typeface="Calibri" panose="020F0502020204030204" pitchFamily="34" charset="0"/>
+              </a:rPr>
+              <a:t>Education Level Strongly Influences Defaults-</a:t>
+            </a:r>
+          </a:p>
+          <a:p>
+            <a:pPr marL="285750" indent="-285750">
+              <a:buFont typeface="Arial" panose="020B0604020202020204" pitchFamily="34" charset="0"/>
+              <a:buChar char="•"/>
+            </a:pPr>
+            <a:r>
+              <a:rPr lang="en-US" sz="1600" noProof="0" dirty="0">
+                <a:latin typeface="Calibri" panose="020F0502020204030204" pitchFamily="34" charset="0"/>
+                <a:ea typeface="Calibri" panose="020F0502020204030204" pitchFamily="34" charset="0"/>
+                <a:cs typeface="Calibri" panose="020F0502020204030204" pitchFamily="34" charset="0"/>
+              </a:rPr>
+              <a:t>Secondary / Secondary Special Education has the highest number of defaults (~19.5K).Higher education borrowers show much lower defaults (~4K).Very low defaults in incomplete higher and lower secondary education.</a:t>
+            </a:r>
+          </a:p>
+          <a:p>
+            <a:endParaRPr lang="en-US" sz="1600" dirty="0">
+              <a:latin typeface="Calibri" panose="020F0502020204030204" pitchFamily="34" charset="0"/>
+              <a:ea typeface="Calibri" panose="020F0502020204030204" pitchFamily="34" charset="0"/>
+              <a:cs typeface="Calibri" panose="020F0502020204030204" pitchFamily="34" charset="0"/>
+            </a:endParaRPr>
+          </a:p>
+          <a:p>
+            <a:r>
+              <a:rPr lang="en-US" b="1" noProof="0" dirty="0">
+                <a:latin typeface="Calibri" panose="020F0502020204030204" pitchFamily="34" charset="0"/>
+                <a:ea typeface="Calibri" panose="020F0502020204030204" pitchFamily="34" charset="0"/>
+                <a:cs typeface="Calibri" panose="020F0502020204030204" pitchFamily="34" charset="0"/>
+              </a:rPr>
+              <a:t>Income Type is a Major Risk Indicator-</a:t>
+            </a:r>
+          </a:p>
+          <a:p>
+            <a:pPr marL="285750" indent="-285750">
+              <a:buFont typeface="Arial" panose="020B0604020202020204" pitchFamily="34" charset="0"/>
+              <a:buChar char="•"/>
+            </a:pPr>
+            <a:r>
+              <a:rPr lang="en-US" sz="1600" noProof="0" dirty="0">
+                <a:latin typeface="Calibri" panose="020F0502020204030204" pitchFamily="34" charset="0"/>
+                <a:ea typeface="Calibri" panose="020F0502020204030204" pitchFamily="34" charset="0"/>
+                <a:cs typeface="Calibri" panose="020F0502020204030204" pitchFamily="34" charset="0"/>
+              </a:rPr>
+              <a:t>Unemployed borrowers and borrowers on maternity leave contribute the highest default share (~73.02%)</a:t>
+            </a:r>
+          </a:p>
+          <a:p>
+            <a:pPr marL="285750" indent="-285750">
+              <a:buFont typeface="Arial" panose="020B0604020202020204" pitchFamily="34" charset="0"/>
+              <a:buChar char="•"/>
+            </a:pPr>
+            <a:r>
+              <a:rPr lang="en-US" sz="1600" noProof="0" dirty="0">
+                <a:latin typeface="Calibri" panose="020F0502020204030204" pitchFamily="34" charset="0"/>
+                <a:ea typeface="Calibri" panose="020F0502020204030204" pitchFamily="34" charset="0"/>
+                <a:cs typeface="Calibri" panose="020F0502020204030204" pitchFamily="34" charset="0"/>
+              </a:rPr>
+              <a:t>Borrowers without stable income sources have significantly higher default risk.</a:t>
+            </a:r>
+          </a:p>
+        </p:txBody>
+      </p:sp>
+      <p:sp>
+        <p:nvSpPr>
+          <p:cNvPr id="3" name="TextBox 2">
+            <a:extLst>
+              <a:ext uri="{FF2B5EF4-FFF2-40B4-BE49-F238E27FC236}">
+                <a16:creationId xmlns:a16="http://schemas.microsoft.com/office/drawing/2014/main" id="{AD90E0EB-A0AA-D6B9-AEB8-D369D05A67EB}"/>
+              </a:ext>
+            </a:extLst>
+          </p:cNvPr>
+          <p:cNvSpPr txBox="1"/>
           <p:nvPr/>
-        </p:nvPicPr>
-        <p:blipFill>
-          <a:blip r:embed="rId2">
-            <a:extLst>
-              <a:ext uri="{28A0092B-C50C-407E-A947-70E740481C1C}">
-                <a14:useLocalDpi xmlns:a14="http://schemas.microsoft.com/office/drawing/2010/main" val="0"/>
-              </a:ext>
-            </a:extLst>
-          </a:blip>
-          <a:stretch>
-            <a:fillRect/>
-          </a:stretch>
-        </p:blipFill>
+        </p:nvSpPr>
         <p:spPr>
           <a:xfrm>
-            <a:off x="0" y="-12631"/>
-            <a:ext cx="12192000" cy="6832461"/>
+            <a:off x="812800" y="4559395"/>
+            <a:ext cx="10566400" cy="1077218"/>
           </a:xfrm>
           <a:prstGeom prst="rect">
             <a:avLst/>
           </a:prstGeom>
+          <a:noFill/>
         </p:spPr>
-      </p:pic>
+        <p:txBody>
+          <a:bodyPr wrap="square">
+            <a:spAutoFit/>
+          </a:bodyPr>
+          <a:lstStyle/>
+          <a:p>
+            <a:r>
+              <a:rPr lang="en-US" sz="1600" i="1" dirty="0">
+                <a:latin typeface="Calibri" panose="020F0502020204030204" pitchFamily="34" charset="0"/>
+                <a:ea typeface="Calibri" panose="020F0502020204030204" pitchFamily="34" charset="0"/>
+                <a:cs typeface="Calibri" panose="020F0502020204030204" pitchFamily="34" charset="0"/>
+              </a:rPr>
+              <a:t>The analysis reveals that employment stability, occupation type, and education level are the key drivers of loan defaults. Borrowers with unstable income sources and low-skill occupations demonstrate significantly higher credit risk. These insights enable financial institutions to refine credit scoring models and implement targeted lending strategies to minimize financial losses.</a:t>
+            </a:r>
+            <a:endParaRPr lang="en-IN" sz="1600" i="1" dirty="0">
+              <a:latin typeface="Calibri" panose="020F0502020204030204" pitchFamily="34" charset="0"/>
+              <a:ea typeface="Calibri" panose="020F0502020204030204" pitchFamily="34" charset="0"/>
+              <a:cs typeface="Calibri" panose="020F0502020204030204" pitchFamily="34" charset="0"/>
+            </a:endParaRPr>
+          </a:p>
+        </p:txBody>
+      </p:sp>
     </p:spTree>
     <p:extLst>
       <p:ext uri="{BB962C8B-B14F-4D97-AF65-F5344CB8AC3E}">
-        <p14:creationId xmlns:p14="http://schemas.microsoft.com/office/powerpoint/2010/main" val="2432029978"/>
+        <p14:creationId xmlns:p14="http://schemas.microsoft.com/office/powerpoint/2010/main" val="2898708136"/>
       </p:ext>
     </p:extLst>
   </p:cSld>
